--- a/Foundation_F6/Workshop/F6-W05_Apply_Workshop_L09-L10_Day_Trip_Listen_Then_Blog.pptx
+++ b/Foundation_F6/Workshop/F6-W05_Apply_Workshop_L09-L10_Day_Trip_Listen_Then_Blog.pptx
@@ -7462,7 +7462,7 @@
                 <a:latin typeface="Calibri" pitchFamily="34" charset="0"/>
                 <a:cs typeface="Amiri" pitchFamily="2" charset="-78"/>
               </a:rPr>
-              <a:t>Odd numbers come from F6-L09, even numbers from F6-L10. Core: a full sentence from the starter. Develop: add the “more” part. Stretch: link two answers with </a:t>
+              <a:t>Odd numbers come from F6-L09, even numbers from F6-L10. Core: a full sentence from the starter. Develop: add the “more” part. Stretch: link two answers with ‏</a:t>
             </a:r>
             <a:pPr algn="l" indent="0" marL="0">
               <a:buNone/>
@@ -7489,7 +7489,7 @@
                 <a:latin typeface="Calibri" pitchFamily="34" charset="0"/>
                 <a:cs typeface="Amiri" pitchFamily="2" charset="-78"/>
               </a:rPr>
-              <a:t>, </a:t>
+              <a:t>‏, ‏</a:t>
             </a:r>
             <a:pPr algn="l" indent="0" marL="0">
               <a:buNone/>
@@ -7516,7 +7516,7 @@
                 <a:latin typeface="Calibri" pitchFamily="34" charset="0"/>
                 <a:cs typeface="Amiri" pitchFamily="2" charset="-78"/>
               </a:rPr>
-              <a:t> or </a:t>
+              <a:t>‏ or ‏</a:t>
             </a:r>
             <a:pPr algn="l" indent="0" marL="0">
               <a:buNone/>
@@ -7543,7 +7543,7 @@
                 <a:latin typeface="Calibri" pitchFamily="34" charset="0"/>
                 <a:cs typeface="Amiri" pitchFamily="2" charset="-78"/>
               </a:rPr>
-              <a:t>. Swap after each question.</a:t>
+              <a:t>‏. Swap after each question.</a:t>
             </a:r>
             <a:endParaRPr lang="en-US" sz="1100" dirty="0"/>
           </a:p>
@@ -10872,7 +10872,7 @@
                 <a:latin typeface="Calibri" pitchFamily="34" charset="0"/>
                 <a:cs typeface="Amiri" pitchFamily="2" charset="-78"/>
               </a:rPr>
-              <a:t>Add </a:t>
+              <a:t>Add ‏</a:t>
             </a:r>
             <a:pPr algn="l" indent="0" marL="0">
               <a:buNone/>
@@ -10899,7 +10899,7 @@
                 <a:latin typeface="Calibri" pitchFamily="34" charset="0"/>
                 <a:cs typeface="Amiri" pitchFamily="2" charset="-78"/>
               </a:rPr>
-              <a:t> … and an advantage: </a:t>
+              <a:t> …‏ and an advantage: ‏</a:t>
             </a:r>
             <a:pPr algn="l" indent="0" marL="0">
               <a:buNone/>
@@ -10926,7 +10926,7 @@
                 <a:latin typeface="Calibri" pitchFamily="34" charset="0"/>
                 <a:cs typeface="Amiri" pitchFamily="2" charset="-78"/>
               </a:rPr>
-              <a:t> …</a:t>
+              <a:t> …‏</a:t>
             </a:r>
             <a:endParaRPr lang="en-US" sz="1150" dirty="0"/>
           </a:p>
@@ -11063,7 +11063,7 @@
                 <a:latin typeface="Calibri" pitchFamily="34" charset="0"/>
                 <a:cs typeface="Amiri" pitchFamily="2" charset="-78"/>
               </a:rPr>
-              <a:t>Add </a:t>
+              <a:t>Add ‏</a:t>
             </a:r>
             <a:pPr algn="l" indent="0" marL="0">
               <a:buNone/>
@@ -11090,7 +11090,7 @@
                 <a:latin typeface="Calibri" pitchFamily="34" charset="0"/>
                 <a:cs typeface="Amiri" pitchFamily="2" charset="-78"/>
               </a:rPr>
-              <a:t> … and </a:t>
+              <a:t> …‏ and ‏</a:t>
             </a:r>
             <a:pPr algn="l" indent="0" marL="0">
               <a:buNone/>
@@ -11117,7 +11117,7 @@
                 <a:latin typeface="Calibri" pitchFamily="34" charset="0"/>
                 <a:cs typeface="Amiri" pitchFamily="2" charset="-78"/>
               </a:rPr>
-              <a:t> …</a:t>
+              <a:t> …‏</a:t>
             </a:r>
             <a:endParaRPr lang="en-US" sz="1150" dirty="0"/>
           </a:p>
@@ -17561,7 +17561,7 @@
                 <a:latin typeface="Calibri" pitchFamily="34" charset="0"/>
                 <a:cs typeface="Amiri" pitchFamily="2" charset="-78"/>
               </a:rPr>
-              <a:t>Feminine → </a:t>
+              <a:t>Feminine → ‏</a:t>
             </a:r>
             <a:pPr algn="l" indent="0" marL="0">
               <a:buNone/>
@@ -17588,7 +17588,7 @@
                 <a:latin typeface="Calibri" pitchFamily="34" charset="0"/>
                 <a:cs typeface="Amiri" pitchFamily="2" charset="-78"/>
               </a:rPr>
-              <a:t>.</a:t>
+              <a:t>‏.</a:t>
             </a:r>
             <a:endParaRPr lang="en-US" sz="1150" dirty="0"/>
           </a:p>
@@ -17795,6 +17795,19 @@
               <a:buNone/>
             </a:pPr>
             <a:r>
+              <a:rPr lang="en-US" sz="1150" b="1" dirty="0">
+                <a:solidFill>
+                  <a:srgbClr val="1B3B6F"/>
+                </a:solidFill>
+                <a:latin typeface="Calibri" pitchFamily="34" charset="0"/>
+                <a:cs typeface="Amiri" pitchFamily="2" charset="-78"/>
+              </a:rPr>
+              <a:t>‏</a:t>
+            </a:r>
+            <a:pPr algn="l" indent="0" marL="0">
+              <a:buNone/>
+            </a:pPr>
+            <a:r>
               <a:rPr lang="ar-SA" altLang="en-US" sz="1500" b="1" dirty="0">
                 <a:solidFill>
                   <a:srgbClr val="1B3B6F"/>
@@ -17816,7 +17829,7 @@
                 <a:latin typeface="Calibri" pitchFamily="34" charset="0"/>
                 <a:cs typeface="Amiri" pitchFamily="2" charset="-78"/>
               </a:rPr>
-              <a:t> → a place.</a:t>
+              <a:t>‏ → a place.</a:t>
             </a:r>
             <a:endParaRPr lang="en-US" sz="1150" dirty="0"/>
           </a:p>
@@ -18020,6 +18033,19 @@
               <a:buNone/>
             </a:pPr>
             <a:r>
+              <a:rPr lang="en-US" sz="1150" b="1" dirty="0">
+                <a:solidFill>
+                  <a:srgbClr val="1B3B6F"/>
+                </a:solidFill>
+                <a:latin typeface="Calibri" pitchFamily="34" charset="0"/>
+                <a:cs typeface="Amiri" pitchFamily="2" charset="-78"/>
+              </a:rPr>
+              <a:t>‏</a:t>
+            </a:r>
+            <a:pPr algn="l" indent="0" marL="0">
+              <a:buNone/>
+            </a:pPr>
+            <a:r>
               <a:rPr lang="ar-SA" altLang="en-US" sz="1500" b="1" dirty="0">
                 <a:solidFill>
                   <a:srgbClr val="1B3B6F"/>
@@ -18041,7 +18067,7 @@
                 <a:latin typeface="Calibri" pitchFamily="34" charset="0"/>
                 <a:cs typeface="Amiri" pitchFamily="2" charset="-78"/>
               </a:rPr>
-              <a:t> + attached pronoun: </a:t>
+              <a:t>‏ + attached pronoun: ‏</a:t>
             </a:r>
             <a:pPr algn="l" indent="0" marL="0">
               <a:buNone/>
@@ -18068,7 +18094,7 @@
                 <a:latin typeface="Calibri" pitchFamily="34" charset="0"/>
                 <a:cs typeface="Amiri" pitchFamily="2" charset="-78"/>
               </a:rPr>
-              <a:t>.</a:t>
+              <a:t>‏.</a:t>
             </a:r>
             <a:endParaRPr lang="en-US" sz="1150" dirty="0"/>
           </a:p>
@@ -20268,7 +20294,7 @@
                 <a:latin typeface="Calibri" pitchFamily="34" charset="0"/>
                 <a:cs typeface="Amiri" pitchFamily="2" charset="-78"/>
               </a:rPr>
-              <a:t>☐  At least one </a:t>
+              <a:t>☐  At least one ‏</a:t>
             </a:r>
             <a:pPr algn="l" indent="0" marL="0">
               <a:buNone/>
@@ -20295,7 +20321,7 @@
                 <a:latin typeface="Calibri" pitchFamily="34" charset="0"/>
                 <a:cs typeface="Amiri" pitchFamily="2" charset="-78"/>
               </a:rPr>
-              <a:t> and one </a:t>
+              <a:t>‏ and one ‏</a:t>
             </a:r>
             <a:pPr algn="l" indent="0" marL="0">
               <a:buNone/>
@@ -20322,7 +20348,7 @@
                 <a:latin typeface="Calibri" pitchFamily="34" charset="0"/>
                 <a:cs typeface="Amiri" pitchFamily="2" charset="-78"/>
               </a:rPr>
-              <a:t> (Develop).</a:t>
+              <a:t>‏ (Develop).</a:t>
             </a:r>
             <a:endParaRPr lang="en-US" sz="1200" dirty="0"/>
           </a:p>
@@ -23870,7 +23896,7 @@
                 <a:latin typeface="Calibri" pitchFamily="34" charset="0"/>
                 <a:cs typeface="Amiri" pitchFamily="2" charset="-78"/>
               </a:rPr>
-              <a:t>include a reason and a deliberate distractor (</a:t>
+              <a:t>include a reason and a deliberate distractor (‏</a:t>
             </a:r>
             <a:pPr algn="l" indent="0" marL="0">
               <a:buNone/>
@@ -23897,7 +23923,7 @@
                 <a:latin typeface="Calibri" pitchFamily="34" charset="0"/>
                 <a:cs typeface="Amiri" pitchFamily="2" charset="-78"/>
               </a:rPr>
-              <a:t>)?</a:t>
+              <a:t>‏)?</a:t>
             </a:r>
             <a:endParaRPr lang="en-US" sz="1100" dirty="0"/>
           </a:p>
@@ -24056,7 +24082,7 @@
                 <a:latin typeface="Calibri" pitchFamily="34" charset="0"/>
                 <a:cs typeface="Amiri" pitchFamily="2" charset="-78"/>
               </a:rPr>
-              <a:t>use linking words (</a:t>
+              <a:t>use linking words (‏</a:t>
             </a:r>
             <a:pPr algn="l" indent="0" marL="0">
               <a:buNone/>
@@ -24164,7 +24190,7 @@
                 <a:latin typeface="Calibri" pitchFamily="34" charset="0"/>
                 <a:cs typeface="Amiri" pitchFamily="2" charset="-78"/>
               </a:rPr>
-              <a:t>)?</a:t>
+              <a:t>‏)?</a:t>
             </a:r>
             <a:endParaRPr lang="en-US" sz="1100" dirty="0"/>
           </a:p>
@@ -28159,7 +28185,7 @@
                 <a:latin typeface="Calibri" pitchFamily="34" charset="0"/>
                 <a:cs typeface="Amiri" pitchFamily="2" charset="-78"/>
               </a:rPr>
-              <a:t>I added reasons (</a:t>
+              <a:t>I added reasons (‏</a:t>
             </a:r>
             <a:pPr algn="l" indent="0" marL="0">
               <a:buNone/>
@@ -28186,7 +28212,7 @@
                 <a:latin typeface="Calibri" pitchFamily="34" charset="0"/>
                 <a:cs typeface="Amiri" pitchFamily="2" charset="-78"/>
               </a:rPr>
-              <a:t>) and extra details without frames.</a:t>
+              <a:t>‏) and extra details without frames.</a:t>
             </a:r>
             <a:endParaRPr lang="en-US" sz="1300" dirty="0"/>
           </a:p>
@@ -32314,7 +32340,7 @@
                 <a:latin typeface="Calibri" pitchFamily="34" charset="0"/>
                 <a:cs typeface="Amiri" pitchFamily="2" charset="-78"/>
               </a:rPr>
-              <a:t>☐  Add a reason (</a:t>
+              <a:t>☐  Add a reason (‏</a:t>
             </a:r>
             <a:pPr algn="l" indent="0" marL="0">
               <a:buNone/>
@@ -32341,7 +32367,7 @@
                 <a:latin typeface="Calibri" pitchFamily="34" charset="0"/>
                 <a:cs typeface="Amiri" pitchFamily="2" charset="-78"/>
               </a:rPr>
-              <a:t>) and an extra detail to every point.</a:t>
+              <a:t>‏) and an extra detail to every point.</a:t>
             </a:r>
             <a:endParaRPr lang="en-US" sz="1300" dirty="0"/>
           </a:p>
@@ -33862,7 +33888,7 @@
                 <a:latin typeface="Calibri" pitchFamily="34" charset="0"/>
                 <a:cs typeface="Amiri" pitchFamily="2" charset="-78"/>
               </a:rPr>
-              <a:t>Join a word from each lesson in one sentence with </a:t>
+              <a:t>Join a word from each lesson in one sentence with ‏</a:t>
             </a:r>
             <a:pPr algn="l" indent="0" marL="0">
               <a:buNone/>
@@ -33889,7 +33915,7 @@
                 <a:latin typeface="Calibri" pitchFamily="34" charset="0"/>
                 <a:cs typeface="Amiri" pitchFamily="2" charset="-78"/>
               </a:rPr>
-              <a:t> or </a:t>
+              <a:t>‏ or ‏</a:t>
             </a:r>
             <a:pPr algn="l" indent="0" marL="0">
               <a:buNone/>
@@ -33916,7 +33942,7 @@
                 <a:latin typeface="Calibri" pitchFamily="34" charset="0"/>
                 <a:cs typeface="Amiri" pitchFamily="2" charset="-78"/>
               </a:rPr>
-              <a:t>.</a:t>
+              <a:t>‏.</a:t>
             </a:r>
             <a:endParaRPr lang="en-US" sz="1150" dirty="0"/>
           </a:p>
